--- a/PPTs/L4.3 Latency and Availability Attacks for AD.pptx
+++ b/PPTs/L4.3 Latency and Availability Attacks for AD.pptx
@@ -631,7 +631,7 @@
           <a:lstStyle/>
           <a:p>
             <a:r>
-              <a:t>Companion to L3.3. L3.3 asked: can an attacker make the vehicle see something wrong? L3.4 asks: can an attacker make the vehicle see the right thing too late? Based on the survey by Gu, Gao, Saremi and Chakraborty (arXiv:2609.36732) and the LiU talk on security-aware automotive CPS. About 75 minutes: why 12 min, perception 20, VLM/LLM 10, defenses 13, model-to-system 12, open problems 8. Title figure: our own measurement of greedy NMS in NumPy on one CPU core, benign clustered candidates vs. phantom candidates.</a:t>
+              <a:t>Companion to L4.2. L4.2 asked: can an attacker make the vehicle see something wrong? L4.3 asks: can an attacker make the vehicle see the right thing too late? Based on the survey by Gu, Gao, Saremi and Chakraborty (arXiv:2609.36732) and the LiU talk on security-aware automotive CPS. About 75 minutes: why 12 min, perception 20, VLM/LLM 10, defenses 13, model-to-system 12, open problems 8. Title figure: our own measurement of greedy NMS in NumPy on one CPU core, benign clustered candidates vs. phantom candidates.</a:t>
             </a:r>
           </a:p>
         </p:txBody>
@@ -841,7 +841,7 @@
           <a:lstStyle/>
           <a:p>
             <a:r>
-              <a:t>Part 2 (about 20 minutes): NMS, tracking, LiDAR and cooperative perception. Recall L1.3 for the LiDAR pipeline and L3.3 for tracking-by-detection.</a:t>
+              <a:t>Part 2 (about 20 minutes): NMS, tracking, LiDAR and cooperative perception. Recall L1.3 for the LiDAR pipeline and L4.2 for tracking-by-detection.</a:t>
             </a:r>
           </a:p>
         </p:txBody>
@@ -1331,7 +1331,7 @@
           <a:lstStyle/>
           <a:p>
             <a:r>
-              <a:t>Connects to L3.3 where we used the tracker as a filter. Here the same state becomes the weakness. Caveat from the survey: not all trackers use Hungarian matching; some use greedy or learned association; complexities depend on the implementation.</a:t>
+              <a:t>Connects to L4.2 where we used the tracker as a filter. Here the same state becomes the weakness. Caveat from the survey: not all trackers use Hungarian matching; some use greedy or learned association; complexities depend on the implementation.</a:t>
             </a:r>
           </a:p>
         </p:txBody>
@@ -2171,7 +2171,7 @@
           <a:lstStyle/>
           <a:p>
             <a:r>
-              <a:t>Anchor the lecture in the CIA triad. Everything in L3.2 and L3.3 was integrity. Here the attacker may leave the prediction untouched (some attacks even preserve it by design, e.g., Phantom Sponges keeps the original detections) and instead attacks the clock.</a:t>
+              <a:t>Anchor the lecture in the CIA triad. Everything in L4.1 and L4.2 was integrity. Here the attacker may leave the prediction untouched (some attacks even preserve it by design, e.g., Phantom Sponges keeps the original detections) and instead attacks the clock.</a:t>
             </a:r>
           </a:p>
         </p:txBody>
@@ -2661,7 +2661,7 @@
           <a:lstStyle/>
           <a:p>
             <a:r>
-              <a:t>Teach the standard lesson from L3.2 again in the availability setting: a defense evaluated against non-adaptive attackers proves little. The GateDrain result (Gu et al.) is the negative adaptive result referenced here.</a:t>
+              <a:t>Teach the standard lesson from L4.1 again in the availability setting: a defense evaluated against non-adaptive attackers proves little. The GateDrain result (Gu et al.) is the negative adaptive result referenced here.</a:t>
             </a:r>
           </a:p>
         </p:txBody>
@@ -3221,7 +3221,7 @@
           <a:lstStyle/>
           <a:p>
             <a:r>
-              <a:t>Class exercise (5 minutes). Give each group the same attack and different system parameters. Example: tracker stage A = 50, f = 5 percent, T = 30 ms. With D/T = 1.5 the threshold is 1 + 0.5/0.05 = 11, so 50 exceeds it and the deadline is missed: A_e2e = 1 + 0.05 x 49 = 3.45, so 103 ms against a 45 ms deadline. With a fixed admission cap that limits A to 5, A_e2e = 1.2 and there is no miss. Then ask: what changes if the fallback is a safe stop? Answer: collision becomes unavailability.</a:t>
+              <a:t>Class exercise (5 minutes). Give each group the same attack and different system parameters. Example: tracker stage A = 50, f = 5 percent, T = 30 ms. With D/T = 1.5 the threshold is 1 + 0.5/0.05 = 11, so 50 exceeds it and the deadline is missed: A_e2e = 1 + 0.05 x 49 = 3.45, so 103.5 ms against a 45 ms deadline. With a fixed admission cap that limits A to 5, A_e2e = 1.2 and there is no miss. Then ask: what changes if the fallback is a safe stop? Answer: collision becomes unavailability.</a:t>
             </a:r>
           </a:p>
         </p:txBody>
@@ -15033,7 +15033,7 @@
             </a:r>
             <a:r>
               <a:rPr sz="2400" b="0" i="0"/>
-              <a:t> detections to tracks, update, spawn, retire (L3.3)</a:t>
+              <a:t> detections to tracks, update, spawn, retire (L4.2)</a:t>
             </a:r>
           </a:p>
           <a:p>
@@ -16632,7 +16632,7 @@
             </a:pPr>
             <a:r>
               <a:rPr sz="2000" b="0" i="0"/>
-              <a:t>Trust boundary moves from the sensor to the V2X link (cf. L3.3 data fabrication)</a:t>
+              <a:t>Trust boundary moves from the sensor to the V2X link (cf. L4.2 data fabrication)</a:t>
             </a:r>
           </a:p>
         </p:txBody>
@@ -19897,7 +19897,7 @@
                             <a:srgbClr val="FFFFFF"/>
                           </a:solidFill>
                         </a:rPr>
-                        <a:t>Integrity attack (L3.2, L3.3)</a:t>
+                        <a:t>Integrity attack (L4.1, L4.2)</a:t>
                       </a:r>
                     </a:p>
                   </a:txBody>
